--- a/docs/presentations/development-tooling-v2.pptx
+++ b/docs/presentations/development-tooling-v2.pptx
@@ -118,6 +118,11 @@
       </a:defRPr>
     </a:lvl9pPr>
   </p:defaultTextStyle>
+  <p:extLst>
+    <p:ext uri="{EFAFB233-063F-42B5-8137-9DF3F51BA10A}">
+      <p15:sldGuideLst xmlns:p15="http://schemas.microsoft.com/office/powerpoint/2012/main"/>
+    </p:ext>
+  </p:extLst>
 </p:presentation>
 </file>
 
@@ -2675,44 +2680,6 @@
       </p:sp>
       <p:sp>
         <p:nvSpPr>
-          <p:cNvPr id="3" name="Rectangle 2">
-            <a:extLst>
-              <a:ext uri="{FF2B5EF4-FFF2-40B4-BE49-F238E27FC236}">
-                <a16:creationId xmlns:a16="http://schemas.microsoft.com/office/drawing/2014/main" id="{404B9130-4901-4EC3-9338-1F84CF0F5E14}"/>
-              </a:ext>
-            </a:extLst>
-          </p:cNvPr>
-          <p:cNvSpPr>
-            <a:spLocks noGrp="1"/>
-          </p:cNvSpPr>
-          <p:nvPr/>
-        </p:nvSpPr>
-        <p:spPr>
-          <a:xfrm>
-            <a:off x="647700" y="1257300"/>
-            <a:ext cx="876300" cy="47625"/>
-          </a:xfrm>
-          <a:prstGeom prst="rect">
-            <a:avLst/>
-          </a:prstGeom>
-          <a:solidFill>
-            <a:srgbClr val="64CCC5"/>
-          </a:solidFill>
-          <a:ln w="0">
-            <a:noFill/>
-            <a:prstDash val="solid"/>
-          </a:ln>
-        </p:spPr>
-        <p:txBody>
-          <a:bodyPr/>
-          <a:lstStyle/>
-          <a:p>
-            <a:endParaRPr lang="en-US"/>
-          </a:p>
-        </p:txBody>
-      </p:sp>
-      <p:sp>
-        <p:nvSpPr>
           <p:cNvPr id="5" name="Oval 4">
             <a:extLst>
               <a:ext uri="{FF2B5EF4-FFF2-40B4-BE49-F238E27FC236}">
@@ -4035,6 +4002,44 @@
               </a:rPr>
               <a:t>13</a:t>
             </a:r>
+          </a:p>
+        </p:txBody>
+      </p:sp>
+      <p:sp>
+        <p:nvSpPr>
+          <p:cNvPr id="31" name="Rectangle 30">
+            <a:extLst>
+              <a:ext uri="{FF2B5EF4-FFF2-40B4-BE49-F238E27FC236}">
+                <a16:creationId xmlns:a16="http://schemas.microsoft.com/office/drawing/2014/main" id="{4CF41033-0AC2-022F-0313-4C7464856CAD}"/>
+              </a:ext>
+            </a:extLst>
+          </p:cNvPr>
+          <p:cNvSpPr>
+            <a:spLocks noGrp="1"/>
+          </p:cNvSpPr>
+          <p:nvPr/>
+        </p:nvSpPr>
+        <p:spPr>
+          <a:xfrm flipV="1">
+            <a:off x="647700" y="1448817"/>
+            <a:ext cx="10091636" cy="60896"/>
+          </a:xfrm>
+          <a:prstGeom prst="rect">
+            <a:avLst/>
+          </a:prstGeom>
+          <a:solidFill>
+            <a:srgbClr val="64CCC5"/>
+          </a:solidFill>
+          <a:ln w="0">
+            <a:noFill/>
+            <a:prstDash val="solid"/>
+          </a:ln>
+        </p:spPr>
+        <p:txBody>
+          <a:bodyPr/>
+          <a:lstStyle/>
+          <a:p>
+            <a:endParaRPr lang="en-US"/>
           </a:p>
         </p:txBody>
       </p:sp>
@@ -4214,44 +4219,6 @@
       </p:sp>
       <p:sp>
         <p:nvSpPr>
-          <p:cNvPr id="3" name="Rectangle 2">
-            <a:extLst>
-              <a:ext uri="{FF2B5EF4-FFF2-40B4-BE49-F238E27FC236}">
-                <a16:creationId xmlns:a16="http://schemas.microsoft.com/office/drawing/2014/main" id="{C51ED281-65A9-4CF9-9123-36E45CA9E4A7}"/>
-              </a:ext>
-            </a:extLst>
-          </p:cNvPr>
-          <p:cNvSpPr>
-            <a:spLocks noGrp="1"/>
-          </p:cNvSpPr>
-          <p:nvPr/>
-        </p:nvSpPr>
-        <p:spPr>
-          <a:xfrm>
-            <a:off x="647700" y="1257300"/>
-            <a:ext cx="876300" cy="47625"/>
-          </a:xfrm>
-          <a:prstGeom prst="rect">
-            <a:avLst/>
-          </a:prstGeom>
-          <a:solidFill>
-            <a:srgbClr val="64CCC5"/>
-          </a:solidFill>
-          <a:ln w="0">
-            <a:noFill/>
-            <a:prstDash val="solid"/>
-          </a:ln>
-        </p:spPr>
-        <p:txBody>
-          <a:bodyPr/>
-          <a:lstStyle/>
-          <a:p>
-            <a:endParaRPr lang="en-US"/>
-          </a:p>
-        </p:txBody>
-      </p:sp>
-      <p:sp>
-        <p:nvSpPr>
           <p:cNvPr id="5" name="Oval 4">
             <a:extLst>
               <a:ext uri="{FF2B5EF4-FFF2-40B4-BE49-F238E27FC236}">
@@ -5686,6 +5653,44 @@
               </a:rPr>
               <a:t>14</a:t>
             </a:r>
+          </a:p>
+        </p:txBody>
+      </p:sp>
+      <p:sp>
+        <p:nvSpPr>
+          <p:cNvPr id="33" name="Rectangle 32">
+            <a:extLst>
+              <a:ext uri="{FF2B5EF4-FFF2-40B4-BE49-F238E27FC236}">
+                <a16:creationId xmlns:a16="http://schemas.microsoft.com/office/drawing/2014/main" id="{983CBB49-7B66-16ED-BD27-3FC5D675059F}"/>
+              </a:ext>
+            </a:extLst>
+          </p:cNvPr>
+          <p:cNvSpPr>
+            <a:spLocks noGrp="1"/>
+          </p:cNvSpPr>
+          <p:nvPr/>
+        </p:nvSpPr>
+        <p:spPr>
+          <a:xfrm flipV="1">
+            <a:off x="647700" y="1448817"/>
+            <a:ext cx="10091636" cy="60896"/>
+          </a:xfrm>
+          <a:prstGeom prst="rect">
+            <a:avLst/>
+          </a:prstGeom>
+          <a:solidFill>
+            <a:srgbClr val="64CCC5"/>
+          </a:solidFill>
+          <a:ln w="0">
+            <a:noFill/>
+            <a:prstDash val="solid"/>
+          </a:ln>
+        </p:spPr>
+        <p:txBody>
+          <a:bodyPr/>
+          <a:lstStyle/>
+          <a:p>
+            <a:endParaRPr lang="en-US"/>
           </a:p>
         </p:txBody>
       </p:sp>
@@ -5830,44 +5835,6 @@
       </p:sp>
       <p:sp>
         <p:nvSpPr>
-          <p:cNvPr id="2" name="Rectangle 1">
-            <a:extLst>
-              <a:ext uri="{FF2B5EF4-FFF2-40B4-BE49-F238E27FC236}">
-                <a16:creationId xmlns:a16="http://schemas.microsoft.com/office/drawing/2014/main" id="{1BD0317A-5283-4C97-BE42-606AE4494A8B}"/>
-              </a:ext>
-            </a:extLst>
-          </p:cNvPr>
-          <p:cNvSpPr>
-            <a:spLocks noGrp="1"/>
-          </p:cNvSpPr>
-          <p:nvPr/>
-        </p:nvSpPr>
-        <p:spPr>
-          <a:xfrm>
-            <a:off x="704850" y="1219200"/>
-            <a:ext cx="990600" cy="47625"/>
-          </a:xfrm>
-          <a:prstGeom prst="rect">
-            <a:avLst/>
-          </a:prstGeom>
-          <a:solidFill>
-            <a:srgbClr val="FF8A5B"/>
-          </a:solidFill>
-          <a:ln w="0">
-            <a:noFill/>
-            <a:prstDash val="solid"/>
-          </a:ln>
-        </p:spPr>
-        <p:txBody>
-          <a:bodyPr/>
-          <a:lstStyle/>
-          <a:p>
-            <a:endParaRPr lang="en-US"/>
-          </a:p>
-        </p:txBody>
-      </p:sp>
-      <p:sp>
-        <p:nvSpPr>
           <p:cNvPr id="3" name="Rectangle 2">
             <a:extLst>
               <a:ext uri="{FF2B5EF4-FFF2-40B4-BE49-F238E27FC236}">
@@ -7014,8 +6981,8 @@
         </p:nvSpPr>
         <p:spPr>
           <a:xfrm>
-            <a:off x="666750" y="914400"/>
-            <a:ext cx="9906000" cy="323850"/>
+            <a:off x="666750" y="914399"/>
+            <a:ext cx="9906000" cy="514349"/>
           </a:xfrm>
           <a:prstGeom prst="rect">
             <a:avLst/>
@@ -7031,7 +6998,7 @@
           </a:bodyPr>
           <a:lstStyle/>
           <a:p>
-            <a:pPr algn="l">
+            <a:pPr>
               <a:defRPr sz="1350" b="0">
                 <a:solidFill>
                   <a:srgbClr val="627D98"/>
@@ -7042,7 +7009,7 @@
               </a:defRPr>
             </a:pPr>
             <a:r>
-              <a:rPr sz="1350" b="0">
+              <a:rPr sz="1350" b="0" dirty="0">
                 <a:solidFill>
                   <a:srgbClr val="627D98"/>
                 </a:solidFill>
@@ -7050,8 +7017,50 @@
                 <a:ea typeface="Nimbus Sans"/>
                 <a:cs typeface="Nimbus Sans"/>
               </a:rPr>
-              <a:t>Three independent dimensions create most of the complexity</a:t>
-            </a:r>
+              <a:t>T</a:t>
+            </a:r>
+            <a:r>
+              <a:rPr lang="en-US" sz="1350" b="0" dirty="0">
+                <a:solidFill>
+                  <a:srgbClr val="627D98"/>
+                </a:solidFill>
+                <a:latin typeface="Nimbus Sans"/>
+                <a:ea typeface="Nimbus Sans"/>
+                <a:cs typeface="Nimbus Sans"/>
+              </a:rPr>
+              <a:t>rying to provide coding agents with a consistent working context across multiple repositories, agents and instruction level is complex. </a:t>
+            </a:r>
+          </a:p>
+          <a:p>
+            <a:pPr>
+              <a:defRPr sz="1350" b="0">
+                <a:solidFill>
+                  <a:srgbClr val="627D98"/>
+                </a:solidFill>
+                <a:latin typeface="Nimbus Sans"/>
+                <a:ea typeface="Nimbus Sans"/>
+                <a:cs typeface="Nimbus Sans"/>
+              </a:defRPr>
+            </a:pPr>
+            <a:r>
+              <a:rPr lang="en-US" sz="1350" b="0" dirty="0">
+                <a:solidFill>
+                  <a:srgbClr val="627D98"/>
+                </a:solidFill>
+                <a:latin typeface="Nimbus Sans"/>
+                <a:ea typeface="Nimbus Sans"/>
+                <a:cs typeface="Nimbus Sans"/>
+              </a:rPr>
+              <a:t>A rule must remain intact in all scenarios while allowing scoped overrides.</a:t>
+            </a:r>
+            <a:endParaRPr sz="1350" b="0" dirty="0">
+              <a:solidFill>
+                <a:srgbClr val="627D98"/>
+              </a:solidFill>
+              <a:latin typeface="Nimbus Sans"/>
+              <a:ea typeface="Nimbus Sans"/>
+              <a:cs typeface="Nimbus Sans"/>
+            </a:endParaRPr>
           </a:p>
         </p:txBody>
       </p:sp>
@@ -7071,8 +7080,8 @@
         </p:nvSpPr>
         <p:spPr>
           <a:xfrm>
-            <a:off x="647700" y="1257300"/>
-            <a:ext cx="876300" cy="47625"/>
+            <a:off x="647699" y="1452560"/>
+            <a:ext cx="9563099" cy="45719"/>
           </a:xfrm>
           <a:prstGeom prst="rect">
             <a:avLst/>
@@ -8915,103 +8924,6 @@
                 <a:cs typeface="Nimbus Mono PS"/>
               </a:rPr>
               <a:t>.github/*</a:t>
-            </a:r>
-          </a:p>
-        </p:txBody>
-      </p:sp>
-      <p:sp>
-        <p:nvSpPr>
-          <p:cNvPr id="39" name="Rectangle: Rounded Corners 38">
-            <a:extLst>
-              <a:ext uri="{FF2B5EF4-FFF2-40B4-BE49-F238E27FC236}">
-                <a16:creationId xmlns:a16="http://schemas.microsoft.com/office/drawing/2014/main" id="{D5849A87-8B09-4B3C-B04A-14EBE42C38D5}"/>
-              </a:ext>
-            </a:extLst>
-          </p:cNvPr>
-          <p:cNvSpPr>
-            <a:spLocks noGrp="1"/>
-          </p:cNvSpPr>
-          <p:nvPr/>
-        </p:nvSpPr>
-        <p:spPr>
-          <a:xfrm>
-            <a:off x="4286250" y="5676900"/>
-            <a:ext cx="3295650" cy="800100"/>
-          </a:xfrm>
-          <a:prstGeom prst="roundRect">
-            <a:avLst>
-              <a:gd name="adj" fmla="val 18182"/>
-            </a:avLst>
-          </a:prstGeom>
-          <a:solidFill>
-            <a:srgbClr val="071B2E"/>
-          </a:solidFill>
-          <a:ln w="0">
-            <a:noFill/>
-            <a:prstDash val="solid"/>
-          </a:ln>
-        </p:spPr>
-        <p:txBody>
-          <a:bodyPr/>
-          <a:lstStyle/>
-          <a:p>
-            <a:endParaRPr lang="en-US"/>
-          </a:p>
-        </p:txBody>
-      </p:sp>
-      <p:sp>
-        <p:nvSpPr>
-          <p:cNvPr id="40" name="Rectangle 39">
-            <a:extLst>
-              <a:ext uri="{FF2B5EF4-FFF2-40B4-BE49-F238E27FC236}">
-                <a16:creationId xmlns:a16="http://schemas.microsoft.com/office/drawing/2014/main" id="{980F7398-C6F5-4044-B303-948EBA6099F5}"/>
-              </a:ext>
-            </a:extLst>
-          </p:cNvPr>
-          <p:cNvSpPr>
-            <a:spLocks noGrp="1"/>
-          </p:cNvSpPr>
-          <p:nvPr/>
-        </p:nvSpPr>
-        <p:spPr>
-          <a:xfrm>
-            <a:off x="4505325" y="5848349"/>
-            <a:ext cx="2857500" cy="495299"/>
-          </a:xfrm>
-          <a:prstGeom prst="rect">
-            <a:avLst/>
-          </a:prstGeom>
-          <a:noFill/>
-          <a:ln w="0">
-            <a:noFill/>
-          </a:ln>
-        </p:spPr>
-        <p:txBody>
-          <a:bodyPr anchor="t">
-            <a:noAutofit/>
-          </a:bodyPr>
-          <a:lstStyle/>
-          <a:p>
-            <a:pPr algn="ctr">
-              <a:defRPr sz="1350" b="1">
-                <a:solidFill>
-                  <a:srgbClr val="FFFFFF"/>
-                </a:solidFill>
-                <a:latin typeface="Nimbus Sans"/>
-                <a:ea typeface="Nimbus Sans"/>
-                <a:cs typeface="Nimbus Sans"/>
-              </a:defRPr>
-            </a:pPr>
-            <a:r>
-              <a:rPr sz="1350" b="1" dirty="0">
-                <a:solidFill>
-                  <a:srgbClr val="FFFFFF"/>
-                </a:solidFill>
-                <a:latin typeface="Nimbus Sans"/>
-                <a:ea typeface="Nimbus Sans"/>
-                <a:cs typeface="Nimbus Sans"/>
-              </a:rPr>
-              <a:t>The same rule must survive all three dimensions</a:t>
             </a:r>
           </a:p>
         </p:txBody>
@@ -9282,6 +9194,25 @@
               </a:rPr>
               <a:t>onfiguration</a:t>
             </a:r>
+            <a:r>
+              <a:rPr lang="en-US" sz="2550" b="1" dirty="0">
+                <a:solidFill>
+                  <a:srgbClr val="102A43"/>
+                </a:solidFill>
+                <a:latin typeface="Nimbus Sans"/>
+                <a:ea typeface="Nimbus Sans"/>
+                <a:cs typeface="Nimbus Sans"/>
+              </a:rPr>
+              <a:t> Pattern</a:t>
+            </a:r>
+            <a:endParaRPr sz="2550" b="1" dirty="0">
+              <a:solidFill>
+                <a:srgbClr val="102A43"/>
+              </a:solidFill>
+              <a:latin typeface="Nimbus Sans"/>
+              <a:ea typeface="Nimbus Sans"/>
+              <a:cs typeface="Nimbus Sans"/>
+            </a:endParaRPr>
           </a:p>
         </p:txBody>
       </p:sp>
@@ -9329,7 +9260,7 @@
               </a:defRPr>
             </a:pPr>
             <a:r>
-              <a:rPr sz="1350" b="0">
+              <a:rPr sz="1350" b="0" dirty="0">
                 <a:solidFill>
                   <a:srgbClr val="627D98"/>
                 </a:solidFill>
@@ -9339,44 +9270,6 @@
               </a:rPr>
               <a:t>Each narrower layer adds context without replacing the shared foundation</a:t>
             </a:r>
-          </a:p>
-        </p:txBody>
-      </p:sp>
-      <p:sp>
-        <p:nvSpPr>
-          <p:cNvPr id="3" name="Rectangle 2">
-            <a:extLst>
-              <a:ext uri="{FF2B5EF4-FFF2-40B4-BE49-F238E27FC236}">
-                <a16:creationId xmlns:a16="http://schemas.microsoft.com/office/drawing/2014/main" id="{BECF1420-1C21-415B-A926-851A2EE4D3F3}"/>
-              </a:ext>
-            </a:extLst>
-          </p:cNvPr>
-          <p:cNvSpPr>
-            <a:spLocks noGrp="1"/>
-          </p:cNvSpPr>
-          <p:nvPr/>
-        </p:nvSpPr>
-        <p:spPr>
-          <a:xfrm>
-            <a:off x="647700" y="1257300"/>
-            <a:ext cx="876300" cy="47625"/>
-          </a:xfrm>
-          <a:prstGeom prst="rect">
-            <a:avLst/>
-          </a:prstGeom>
-          <a:solidFill>
-            <a:srgbClr val="64CCC5"/>
-          </a:solidFill>
-          <a:ln w="0">
-            <a:noFill/>
-            <a:prstDash val="solid"/>
-          </a:ln>
-        </p:spPr>
-        <p:txBody>
-          <a:bodyPr/>
-          <a:lstStyle/>
-          <a:p>
-            <a:endParaRPr lang="en-US"/>
           </a:p>
         </p:txBody>
       </p:sp>
@@ -10468,6 +10361,44 @@
               </a:rPr>
               <a:t>05</a:t>
             </a:r>
+          </a:p>
+        </p:txBody>
+      </p:sp>
+      <p:sp>
+        <p:nvSpPr>
+          <p:cNvPr id="29" name="Rectangle 28">
+            <a:extLst>
+              <a:ext uri="{FF2B5EF4-FFF2-40B4-BE49-F238E27FC236}">
+                <a16:creationId xmlns:a16="http://schemas.microsoft.com/office/drawing/2014/main" id="{A20E316F-1689-D1BF-F2E2-26D64F0808DD}"/>
+              </a:ext>
+            </a:extLst>
+          </p:cNvPr>
+          <p:cNvSpPr>
+            <a:spLocks noGrp="1"/>
+          </p:cNvSpPr>
+          <p:nvPr/>
+        </p:nvSpPr>
+        <p:spPr>
+          <a:xfrm flipV="1">
+            <a:off x="647700" y="1448817"/>
+            <a:ext cx="10091636" cy="60896"/>
+          </a:xfrm>
+          <a:prstGeom prst="rect">
+            <a:avLst/>
+          </a:prstGeom>
+          <a:solidFill>
+            <a:srgbClr val="64CCC5"/>
+          </a:solidFill>
+          <a:ln w="0">
+            <a:noFill/>
+            <a:prstDash val="solid"/>
+          </a:ln>
+        </p:spPr>
+        <p:txBody>
+          <a:bodyPr/>
+          <a:lstStyle/>
+          <a:p>
+            <a:endParaRPr lang="en-US"/>
           </a:p>
         </p:txBody>
       </p:sp>
@@ -10618,6 +10549,25 @@
               </a:rPr>
               <a:t>onfiguration</a:t>
             </a:r>
+            <a:r>
+              <a:rPr lang="en-US" sz="2550" b="1" dirty="0">
+                <a:solidFill>
+                  <a:srgbClr val="102A43"/>
+                </a:solidFill>
+                <a:latin typeface="Nimbus Sans"/>
+                <a:ea typeface="Nimbus Sans"/>
+                <a:cs typeface="Nimbus Sans"/>
+              </a:rPr>
+              <a:t> Pattern</a:t>
+            </a:r>
+            <a:endParaRPr sz="2550" b="1" dirty="0">
+              <a:solidFill>
+                <a:srgbClr val="102A43"/>
+              </a:solidFill>
+              <a:latin typeface="Nimbus Sans"/>
+              <a:ea typeface="Nimbus Sans"/>
+              <a:cs typeface="Nimbus Sans"/>
+            </a:endParaRPr>
           </a:p>
         </p:txBody>
       </p:sp>
@@ -10675,44 +10625,6 @@
               </a:rPr>
               <a:t>Each agent reads a different entry point and offers different native features</a:t>
             </a:r>
-          </a:p>
-        </p:txBody>
-      </p:sp>
-      <p:sp>
-        <p:nvSpPr>
-          <p:cNvPr id="3" name="Rectangle 2">
-            <a:extLst>
-              <a:ext uri="{FF2B5EF4-FFF2-40B4-BE49-F238E27FC236}">
-                <a16:creationId xmlns:a16="http://schemas.microsoft.com/office/drawing/2014/main" id="{3245D6AD-EF2E-479D-B52A-F70CC0C82523}"/>
-              </a:ext>
-            </a:extLst>
-          </p:cNvPr>
-          <p:cNvSpPr>
-            <a:spLocks noGrp="1"/>
-          </p:cNvSpPr>
-          <p:nvPr/>
-        </p:nvSpPr>
-        <p:spPr>
-          <a:xfrm>
-            <a:off x="647700" y="1257300"/>
-            <a:ext cx="876300" cy="47625"/>
-          </a:xfrm>
-          <a:prstGeom prst="rect">
-            <a:avLst/>
-          </a:prstGeom>
-          <a:solidFill>
-            <a:srgbClr val="64CCC5"/>
-          </a:solidFill>
-          <a:ln w="0">
-            <a:noFill/>
-            <a:prstDash val="solid"/>
-          </a:ln>
-        </p:spPr>
-        <p:txBody>
-          <a:bodyPr/>
-          <a:lstStyle/>
-          <a:p>
-            <a:endParaRPr lang="en-US"/>
           </a:p>
         </p:txBody>
       </p:sp>
@@ -11727,6 +11639,44 @@
               </a:rPr>
               <a:t>06</a:t>
             </a:r>
+          </a:p>
+        </p:txBody>
+      </p:sp>
+      <p:sp>
+        <p:nvSpPr>
+          <p:cNvPr id="23" name="Rectangle 22">
+            <a:extLst>
+              <a:ext uri="{FF2B5EF4-FFF2-40B4-BE49-F238E27FC236}">
+                <a16:creationId xmlns:a16="http://schemas.microsoft.com/office/drawing/2014/main" id="{682331C1-D89E-E153-E763-8A4ED173A989}"/>
+              </a:ext>
+            </a:extLst>
+          </p:cNvPr>
+          <p:cNvSpPr>
+            <a:spLocks noGrp="1"/>
+          </p:cNvSpPr>
+          <p:nvPr/>
+        </p:nvSpPr>
+        <p:spPr>
+          <a:xfrm flipV="1">
+            <a:off x="647700" y="1453068"/>
+            <a:ext cx="10007330" cy="57150"/>
+          </a:xfrm>
+          <a:prstGeom prst="rect">
+            <a:avLst/>
+          </a:prstGeom>
+          <a:solidFill>
+            <a:srgbClr val="64CCC5"/>
+          </a:solidFill>
+          <a:ln w="0">
+            <a:noFill/>
+            <a:prstDash val="solid"/>
+          </a:ln>
+        </p:spPr>
+        <p:txBody>
+          <a:bodyPr/>
+          <a:lstStyle/>
+          <a:p>
+            <a:endParaRPr lang="en-US"/>
           </a:p>
         </p:txBody>
       </p:sp>
@@ -11906,44 +11856,6 @@
       </p:sp>
       <p:sp>
         <p:nvSpPr>
-          <p:cNvPr id="3" name="Rectangle 2">
-            <a:extLst>
-              <a:ext uri="{FF2B5EF4-FFF2-40B4-BE49-F238E27FC236}">
-                <a16:creationId xmlns:a16="http://schemas.microsoft.com/office/drawing/2014/main" id="{CA20736D-B2E5-45B4-B241-6BC571DC3099}"/>
-              </a:ext>
-            </a:extLst>
-          </p:cNvPr>
-          <p:cNvSpPr>
-            <a:spLocks noGrp="1"/>
-          </p:cNvSpPr>
-          <p:nvPr/>
-        </p:nvSpPr>
-        <p:spPr>
-          <a:xfrm>
-            <a:off x="647700" y="1257300"/>
-            <a:ext cx="876300" cy="47625"/>
-          </a:xfrm>
-          <a:prstGeom prst="rect">
-            <a:avLst/>
-          </a:prstGeom>
-          <a:solidFill>
-            <a:srgbClr val="64CCC5"/>
-          </a:solidFill>
-          <a:ln w="0">
-            <a:noFill/>
-            <a:prstDash val="solid"/>
-          </a:ln>
-        </p:spPr>
-        <p:txBody>
-          <a:bodyPr/>
-          <a:lstStyle/>
-          <a:p>
-            <a:endParaRPr lang="en-US"/>
-          </a:p>
-        </p:txBody>
-      </p:sp>
-      <p:sp>
-        <p:nvSpPr>
           <p:cNvPr id="5" name="Rectangle 4">
             <a:extLst>
               <a:ext uri="{FF2B5EF4-FFF2-40B4-BE49-F238E27FC236}">
@@ -14183,6 +14095,44 @@
               <a:ea typeface="Nimbus Sans"/>
               <a:cs typeface="Nimbus Sans"/>
             </a:endParaRPr>
+          </a:p>
+        </p:txBody>
+      </p:sp>
+      <p:sp>
+        <p:nvSpPr>
+          <p:cNvPr id="39" name="Rectangle 38">
+            <a:extLst>
+              <a:ext uri="{FF2B5EF4-FFF2-40B4-BE49-F238E27FC236}">
+                <a16:creationId xmlns:a16="http://schemas.microsoft.com/office/drawing/2014/main" id="{EB2F08F7-E16E-560E-9F27-0A181813E4D4}"/>
+              </a:ext>
+            </a:extLst>
+          </p:cNvPr>
+          <p:cNvSpPr>
+            <a:spLocks noGrp="1"/>
+          </p:cNvSpPr>
+          <p:nvPr/>
+        </p:nvSpPr>
+        <p:spPr>
+          <a:xfrm flipV="1">
+            <a:off x="647700" y="1448817"/>
+            <a:ext cx="10091636" cy="60896"/>
+          </a:xfrm>
+          <a:prstGeom prst="rect">
+            <a:avLst/>
+          </a:prstGeom>
+          <a:solidFill>
+            <a:srgbClr val="64CCC5"/>
+          </a:solidFill>
+          <a:ln w="0">
+            <a:noFill/>
+            <a:prstDash val="solid"/>
+          </a:ln>
+        </p:spPr>
+        <p:txBody>
+          <a:bodyPr/>
+          <a:lstStyle/>
+          <a:p>
+            <a:endParaRPr lang="en-US"/>
           </a:p>
         </p:txBody>
       </p:sp>
@@ -14342,7 +14292,7 @@
         <p:spPr>
           <a:xfrm>
             <a:off x="666750" y="914400"/>
-            <a:ext cx="9906000" cy="323850"/>
+            <a:ext cx="9906000" cy="504826"/>
           </a:xfrm>
           <a:prstGeom prst="rect">
             <a:avLst/>
@@ -14369,7 +14319,7 @@
               </a:defRPr>
             </a:pPr>
             <a:r>
-              <a:rPr sz="1350" b="0">
+              <a:rPr sz="1350" b="0" dirty="0">
                 <a:solidFill>
                   <a:srgbClr val="627D98"/>
                 </a:solidFill>
@@ -14379,6 +14329,36 @@
               </a:rPr>
               <a:t>A central source publishes versioned knowledge into every application repository</a:t>
             </a:r>
+            <a:r>
+              <a:rPr lang="en-US" sz="1350" b="0" dirty="0">
+                <a:solidFill>
+                  <a:srgbClr val="627D98"/>
+                </a:solidFill>
+                <a:latin typeface="Nimbus Sans"/>
+                <a:ea typeface="Nimbus Sans"/>
+                <a:cs typeface="Nimbus Sans"/>
+              </a:rPr>
+              <a:t>. This ensures that the coding model </a:t>
+            </a:r>
+            <a:r>
+              <a:rPr lang="en-US" sz="1350" dirty="0">
+                <a:solidFill>
+                  <a:srgbClr val="627D98"/>
+                </a:solidFill>
+                <a:latin typeface="Nimbus Sans"/>
+                <a:ea typeface="Nimbus Sans"/>
+                <a:cs typeface="Nimbus Sans"/>
+              </a:rPr>
+              <a:t>matches the commit level of the application. </a:t>
+            </a:r>
+            <a:endParaRPr sz="1350" b="0" dirty="0">
+              <a:solidFill>
+                <a:srgbClr val="627D98"/>
+              </a:solidFill>
+              <a:latin typeface="Nimbus Sans"/>
+              <a:ea typeface="Nimbus Sans"/>
+              <a:cs typeface="Nimbus Sans"/>
+            </a:endParaRPr>
           </a:p>
         </p:txBody>
       </p:sp>
@@ -14397,9 +14377,9 @@
           <p:nvPr/>
         </p:nvSpPr>
         <p:spPr>
-          <a:xfrm>
-            <a:off x="647700" y="1257300"/>
-            <a:ext cx="876300" cy="47625"/>
+          <a:xfrm flipV="1">
+            <a:off x="647700" y="1448817"/>
+            <a:ext cx="10091636" cy="60896"/>
           </a:xfrm>
           <a:prstGeom prst="rect">
             <a:avLst/>
@@ -15549,8 +15529,8 @@
         </p:nvSpPr>
         <p:spPr>
           <a:xfrm>
-            <a:off x="5219700" y="5143500"/>
-            <a:ext cx="1771650" cy="266700"/>
+            <a:off x="5219700" y="5143499"/>
+            <a:ext cx="1771650" cy="740061"/>
           </a:xfrm>
           <a:prstGeom prst="rect">
             <a:avLst/>
@@ -15577,7 +15557,7 @@
               </a:defRPr>
             </a:pPr>
             <a:r>
-              <a:rPr sz="1350" b="1">
+              <a:rPr lang="en-US" sz="1350" b="1" dirty="0">
                 <a:solidFill>
                   <a:srgbClr val="102A43"/>
                 </a:solidFill>
@@ -15585,8 +15565,16 @@
                 <a:ea typeface="Nimbus Sans"/>
                 <a:cs typeface="Nimbus Sans"/>
               </a:rPr>
-              <a:t>Pin and review</a:t>
-            </a:r>
+              <a:t>Repo release is pinned to AI tool version</a:t>
+            </a:r>
+            <a:endParaRPr sz="1350" b="1" dirty="0">
+              <a:solidFill>
+                <a:srgbClr val="102A43"/>
+              </a:solidFill>
+              <a:latin typeface="Nimbus Sans"/>
+              <a:ea typeface="Nimbus Sans"/>
+              <a:cs typeface="Nimbus Sans"/>
+            </a:endParaRPr>
           </a:p>
         </p:txBody>
       </p:sp>
@@ -15997,44 +15985,6 @@
       </p:sp>
       <p:sp>
         <p:nvSpPr>
-          <p:cNvPr id="3" name="Rectangle 2">
-            <a:extLst>
-              <a:ext uri="{FF2B5EF4-FFF2-40B4-BE49-F238E27FC236}">
-                <a16:creationId xmlns:a16="http://schemas.microsoft.com/office/drawing/2014/main" id="{E23292DD-246D-4A82-83A1-7BE37429E32D}"/>
-              </a:ext>
-            </a:extLst>
-          </p:cNvPr>
-          <p:cNvSpPr>
-            <a:spLocks noGrp="1"/>
-          </p:cNvSpPr>
-          <p:nvPr/>
-        </p:nvSpPr>
-        <p:spPr>
-          <a:xfrm>
-            <a:off x="647700" y="1257300"/>
-            <a:ext cx="876300" cy="47625"/>
-          </a:xfrm>
-          <a:prstGeom prst="rect">
-            <a:avLst/>
-          </a:prstGeom>
-          <a:solidFill>
-            <a:srgbClr val="64CCC5"/>
-          </a:solidFill>
-          <a:ln w="0">
-            <a:noFill/>
-            <a:prstDash val="solid"/>
-          </a:ln>
-        </p:spPr>
-        <p:txBody>
-          <a:bodyPr/>
-          <a:lstStyle/>
-          <a:p>
-            <a:endParaRPr lang="en-US"/>
-          </a:p>
-        </p:txBody>
-      </p:sp>
-      <p:sp>
-        <p:nvSpPr>
           <p:cNvPr id="5" name="Rectangle: Rounded Corners 4">
             <a:extLst>
               <a:ext uri="{FF2B5EF4-FFF2-40B4-BE49-F238E27FC236}">
@@ -17324,6 +17274,44 @@
               </a:rPr>
               <a:t>10</a:t>
             </a:r>
+          </a:p>
+        </p:txBody>
+      </p:sp>
+      <p:sp>
+        <p:nvSpPr>
+          <p:cNvPr id="23" name="Rectangle 22">
+            <a:extLst>
+              <a:ext uri="{FF2B5EF4-FFF2-40B4-BE49-F238E27FC236}">
+                <a16:creationId xmlns:a16="http://schemas.microsoft.com/office/drawing/2014/main" id="{B2BEC05D-30C5-B6CA-0920-DE4468F4F835}"/>
+              </a:ext>
+            </a:extLst>
+          </p:cNvPr>
+          <p:cNvSpPr>
+            <a:spLocks noGrp="1"/>
+          </p:cNvSpPr>
+          <p:nvPr/>
+        </p:nvSpPr>
+        <p:spPr>
+          <a:xfrm flipV="1">
+            <a:off x="647700" y="1448817"/>
+            <a:ext cx="10091636" cy="60896"/>
+          </a:xfrm>
+          <a:prstGeom prst="rect">
+            <a:avLst/>
+          </a:prstGeom>
+          <a:solidFill>
+            <a:srgbClr val="64CCC5"/>
+          </a:solidFill>
+          <a:ln w="0">
+            <a:noFill/>
+            <a:prstDash val="solid"/>
+          </a:ln>
+        </p:spPr>
+        <p:txBody>
+          <a:bodyPr/>
+          <a:lstStyle/>
+          <a:p>
+            <a:endParaRPr lang="en-US"/>
           </a:p>
         </p:txBody>
       </p:sp>
@@ -17525,44 +17513,6 @@
       </p:sp>
       <p:sp>
         <p:nvSpPr>
-          <p:cNvPr id="3" name="Rectangle 2">
-            <a:extLst>
-              <a:ext uri="{FF2B5EF4-FFF2-40B4-BE49-F238E27FC236}">
-                <a16:creationId xmlns:a16="http://schemas.microsoft.com/office/drawing/2014/main" id="{F0938037-F1C6-433D-A5AD-6130B49F8B24}"/>
-              </a:ext>
-            </a:extLst>
-          </p:cNvPr>
-          <p:cNvSpPr>
-            <a:spLocks noGrp="1"/>
-          </p:cNvSpPr>
-          <p:nvPr/>
-        </p:nvSpPr>
-        <p:spPr>
-          <a:xfrm>
-            <a:off x="647700" y="1257300"/>
-            <a:ext cx="876300" cy="47625"/>
-          </a:xfrm>
-          <a:prstGeom prst="rect">
-            <a:avLst/>
-          </a:prstGeom>
-          <a:solidFill>
-            <a:srgbClr val="64CCC5"/>
-          </a:solidFill>
-          <a:ln w="0">
-            <a:noFill/>
-            <a:prstDash val="solid"/>
-          </a:ln>
-        </p:spPr>
-        <p:txBody>
-          <a:bodyPr/>
-          <a:lstStyle/>
-          <a:p>
-            <a:endParaRPr lang="en-US"/>
-          </a:p>
-        </p:txBody>
-      </p:sp>
-      <p:sp>
-        <p:nvSpPr>
           <p:cNvPr id="5" name="Rectangle: Rounded Corners 4">
             <a:extLst>
               <a:ext uri="{FF2B5EF4-FFF2-40B4-BE49-F238E27FC236}">
@@ -18707,6 +18657,44 @@
               </a:rPr>
               <a:t>11</a:t>
             </a:r>
+          </a:p>
+        </p:txBody>
+      </p:sp>
+      <p:sp>
+        <p:nvSpPr>
+          <p:cNvPr id="17" name="Rectangle 16">
+            <a:extLst>
+              <a:ext uri="{FF2B5EF4-FFF2-40B4-BE49-F238E27FC236}">
+                <a16:creationId xmlns:a16="http://schemas.microsoft.com/office/drawing/2014/main" id="{E2C7E500-D947-023C-E565-713B2C2D96D8}"/>
+              </a:ext>
+            </a:extLst>
+          </p:cNvPr>
+          <p:cNvSpPr>
+            <a:spLocks noGrp="1"/>
+          </p:cNvSpPr>
+          <p:nvPr/>
+        </p:nvSpPr>
+        <p:spPr>
+          <a:xfrm flipV="1">
+            <a:off x="647700" y="1448817"/>
+            <a:ext cx="10091636" cy="60896"/>
+          </a:xfrm>
+          <a:prstGeom prst="rect">
+            <a:avLst/>
+          </a:prstGeom>
+          <a:solidFill>
+            <a:srgbClr val="64CCC5"/>
+          </a:solidFill>
+          <a:ln w="0">
+            <a:noFill/>
+            <a:prstDash val="solid"/>
+          </a:ln>
+        </p:spPr>
+        <p:txBody>
+          <a:bodyPr/>
+          <a:lstStyle/>
+          <a:p>
+            <a:endParaRPr lang="en-US"/>
           </a:p>
         </p:txBody>
       </p:sp>
@@ -18886,44 +18874,6 @@
       </p:sp>
       <p:sp>
         <p:nvSpPr>
-          <p:cNvPr id="3" name="Rectangle 2">
-            <a:extLst>
-              <a:ext uri="{FF2B5EF4-FFF2-40B4-BE49-F238E27FC236}">
-                <a16:creationId xmlns:a16="http://schemas.microsoft.com/office/drawing/2014/main" id="{94123A3A-7D12-4172-BF9E-3ED78BF44EB8}"/>
-              </a:ext>
-            </a:extLst>
-          </p:cNvPr>
-          <p:cNvSpPr>
-            <a:spLocks noGrp="1"/>
-          </p:cNvSpPr>
-          <p:nvPr/>
-        </p:nvSpPr>
-        <p:spPr>
-          <a:xfrm>
-            <a:off x="647700" y="1257300"/>
-            <a:ext cx="876300" cy="47625"/>
-          </a:xfrm>
-          <a:prstGeom prst="rect">
-            <a:avLst/>
-          </a:prstGeom>
-          <a:solidFill>
-            <a:srgbClr val="64CCC5"/>
-          </a:solidFill>
-          <a:ln w="0">
-            <a:noFill/>
-            <a:prstDash val="solid"/>
-          </a:ln>
-        </p:spPr>
-        <p:txBody>
-          <a:bodyPr/>
-          <a:lstStyle/>
-          <a:p>
-            <a:endParaRPr lang="en-US"/>
-          </a:p>
-        </p:txBody>
-      </p:sp>
-      <p:sp>
-        <p:nvSpPr>
           <p:cNvPr id="5" name="Rectangle 4">
             <a:extLst>
               <a:ext uri="{FF2B5EF4-FFF2-40B4-BE49-F238E27FC236}">
@@ -20926,6 +20876,44 @@
               </a:rPr>
               <a:t>12</a:t>
             </a:r>
+          </a:p>
+        </p:txBody>
+      </p:sp>
+      <p:sp>
+        <p:nvSpPr>
+          <p:cNvPr id="45" name="Rectangle 44">
+            <a:extLst>
+              <a:ext uri="{FF2B5EF4-FFF2-40B4-BE49-F238E27FC236}">
+                <a16:creationId xmlns:a16="http://schemas.microsoft.com/office/drawing/2014/main" id="{EC1D20EC-938E-1688-A373-CED304E22187}"/>
+              </a:ext>
+            </a:extLst>
+          </p:cNvPr>
+          <p:cNvSpPr>
+            <a:spLocks noGrp="1"/>
+          </p:cNvSpPr>
+          <p:nvPr/>
+        </p:nvSpPr>
+        <p:spPr>
+          <a:xfrm flipV="1">
+            <a:off x="647700" y="1448817"/>
+            <a:ext cx="10091636" cy="60896"/>
+          </a:xfrm>
+          <a:prstGeom prst="rect">
+            <a:avLst/>
+          </a:prstGeom>
+          <a:solidFill>
+            <a:srgbClr val="64CCC5"/>
+          </a:solidFill>
+          <a:ln w="0">
+            <a:noFill/>
+            <a:prstDash val="solid"/>
+          </a:ln>
+        </p:spPr>
+        <p:txBody>
+          <a:bodyPr/>
+          <a:lstStyle/>
+          <a:p>
+            <a:endParaRPr lang="en-US"/>
           </a:p>
         </p:txBody>
       </p:sp>
